--- a/docs/defence/Monarch_Supervisor_Deck_Script.pptx
+++ b/docs/defence/Monarch_Supervisor_Deck_Script.pptx
@@ -1103,7 +1103,7 @@
           </a:p>
           <a:p>
             <a:r>
-              <a:t>Does the brain model match real brains? A company audit claimed it was the opposite, so we tested it on public brain scans of people watching Friends. Real people agree with each other at 0.152 over the episode; that's the ceiling. On a two-minute clip, the best possible is 0.096 and the model reaches 0.028, about 30 percent of the way, with p of 0.048. Weak but positive. We also found and fixed three hidden bugs. This is Paper 3.</a:t>
+              <a:t>Does the brain model match real brains? A company audit claimed it was the opposite, so we tested it on public brain scans of people watching Friends. Real people agree with each other at 0.152 over the episode; that's the ceiling. On a two-minute clip, the best possible is 0.096 and the model reaches 0.028, about 30 percent of the way. The p-value, the chance this match is luck, is 0.048. Weak but positive. We also found and fixed three hidden bugs. This is Paper 3.</a:t>
             </a:r>
           </a:p>
           <a:p/>
@@ -1204,7 +1204,7 @@
           </a:p>
           <a:p>
             <a:r>
-              <a:t>The physics result. We link our score to the model with h equals alpha X: the push is the score times a strength, alpha. We couldn't measure alpha, so we asked how big it must be to flip a majority. The model gives h c, the smallest push that flips it, which grows with the copying strength beta J. Dividing by the spread of our scores, delta X of 0.124, gives the curve. At beta J of 2, alpha must be at least 4.29. It is a bar any future claim must clear, not a claim that media flips opinion.</a:t>
+              <a:t>The physics result. We connect our score to the model by saying the external field, the media push, equals a coupling constant alpha times our observable X, the score. We could not measure alpha, so we asked how big it must be to flip a majority. The model gives the critical field, h c: the smallest outside push that flips the group's average opinion, like the field needed to flip a magnet. It grows with the reduced coupling, beta J, which is how strongly people copy each other. Above one, a group settles on a majority by itself, like a magnet below its Curie temperature. Dividing the critical field by the spread of our scores, delta X of 0.124, gives the curve. When beta J is 2, a strongly connected group, alpha must be at least 4.29. It is a bar any future claim must clear, not a claim that media flips opinion.</a:t>
             </a:r>
           </a:p>
           <a:p/>
@@ -1215,12 +1215,27 @@
           </a:p>
           <a:p>
             <a:r>
-              <a:t>- h = alpha X</a:t>
-            </a:r>
-          </a:p>
-          <a:p>
-            <a:r>
-              <a:t>- Delta X = 0.124 (-0.070 to +0.054)</a:t>
+              <a:t>- h = external field = media push = alpha x X</a:t>
+            </a:r>
+          </a:p>
+          <a:p>
+            <a:r>
+              <a:t>- alpha = coupling constant = push per unit of score</a:t>
+            </a:r>
+          </a:p>
+          <a:p>
+            <a:r>
+              <a:t>- h_c = critical field = smallest push that flips the majority</a:t>
+            </a:r>
+          </a:p>
+          <a:p>
+            <a:r>
+              <a:t>- beta J = reduced coupling = how strongly people copy each other</a:t>
+            </a:r>
+          </a:p>
+          <a:p>
+            <a:r>
+              <a:t>- Delta X = spread of scores = 0.124 (-0.070 to +0.054)</a:t>
             </a:r>
           </a:p>
           <a:p>
@@ -1252,7 +1267,7 @@
           </a:p>
           <a:p>
             <a:r>
-              <a:t>A: It's a bar. Any claim that such content flips a strongly connected group must use alpha of at least 4.29, or the model says it can't.</a:t>
+              <a:t>A: It's a bar. Alpha is the coupling constant that turns our score into a push. Any claim that such content flips a strongly connected group must use an alpha of at least 4.29, or the model says it can't happen.</a:t>
             </a:r>
           </a:p>
         </p:txBody>
@@ -1740,7 +1755,7 @@
           </a:p>
           <a:p>
             <a:r>
-              <a:t>Physicists model a group forming an opinion the same way they model tiny magnets lining up. The equation is m equals tanh of beta J m plus h. m is the group's average opinion, from minus one, everyone against, to plus one, everyone for. J is how strongly each person is pulled toward the people around them. Beta is how firmly they follow that pull instead of acting at random. And h is the push from media, the same on everyone. In every study I read, h is chosen by hand. My question: can we measure h from the content itself?</a:t>
+              <a:t>Physicists model a group forming an opinion with the Ising model, the same maths as tiny magnets lining up. In a magnet each atom's spin points up or down; here each person holds one of two opinions. The equation says the magnetisation equals tanh of the reduced coupling times the magnetisation, plus the external field. The magnetisation, m, is not mass: it is the average direction of all the spins, so here it is the group's average opinion, from minus one, everyone against, to plus one, everyone for. The coupling, J, is how strongly each person is pulled toward the people around them. Beta is the inverse temperature: in a magnet, one over the temperature; here, how firmly people follow that pull instead of acting at random. The external field, h, is in a magnet an outside magnetic field; here it is the push from media, the same on everyone. In every study I read, the external field is chosen by hand. My question: can we measure it from the content itself?</a:t>
             </a:r>
           </a:p>
           <a:p/>
@@ -1751,22 +1766,22 @@
           </a:p>
           <a:p>
             <a:r>
-              <a:t>- m: average opinion, -1 to +1</a:t>
-            </a:r>
-          </a:p>
-          <a:p>
-            <a:r>
-              <a:t>- J: pull toward neighbours</a:t>
-            </a:r>
-          </a:p>
-          <a:p>
-            <a:r>
-              <a:t>- beta: how firmly people follow the pull</a:t>
-            </a:r>
-          </a:p>
-          <a:p>
-            <a:r>
-              <a:t>- h: media's push</a:t>
+              <a:t>- m = magnetisation (not mass) = average opinion, -1 to +1</a:t>
+            </a:r>
+          </a:p>
+          <a:p>
+            <a:r>
+              <a:t>- J = coupling = pull toward neighbours</a:t>
+            </a:r>
+          </a:p>
+          <a:p>
+            <a:r>
+              <a:t>- beta = inverse temperature = how firmly people follow the pull</a:t>
+            </a:r>
+          </a:p>
+          <a:p>
+            <a:r>
+              <a:t>- h = external field = media's push on everyone</a:t>
             </a:r>
           </a:p>
         </p:txBody>
@@ -1841,7 +1856,7 @@
           </a:p>
           <a:p>
             <a:r>
-              <a:t>Before the results, here is what changed from the proposal once we tested the tools. Five things. We planned to measure the amygdala, but the model only sees the brain's surface. The ratio score broke, so we used a difference. Outrage didn't stand out; fear did. We couldn't measure alpha, so we derived the minimum instead. And the score turned out to be a measurement, not a detector. All of this is in the amendment you approved.</a:t>
+              <a:t>Before the results, here is what changed from the proposal once we tested the tools. Five things. We planned to measure the amygdala, but the model only sees the brain's surface. The ratio score broke, so we used a difference. Outrage didn't stand out; fear did. We couldn't measure the coupling constant alpha, which turns our score into a push, so we derived its minimum instead. And the score turned out to be a measurement, not a detector. All of this is in the amendment you approved.</a:t>
             </a:r>
           </a:p>
           <a:p/>
@@ -1948,7 +1963,7 @@
           </a:p>
           <a:p>
             <a:r>
-              <a:t>This is how one article becomes one number. The article is read aloud by a text-to-speech voice, because the brain model was built on people listening. A timing tool marks when each word is said. Then TRIBE v2, a model from Meta's research lab trained on brain scans of adult volunteers watching TV, predicts activity at 20,484 points on the brain's surface. A standard brain map picks 1,030 points linked to emotion and 851 linked to reasoning. The score X is the emotion average minus the reasoning average. Nobody was scanned: every value is a prediction.</a:t>
+              <a:t>This is how one article becomes one number. The article is read aloud by a text-to-speech voice, because the brain model was built on people listening. A timing tool marks when each word is said. Then TRIBE v2, a model from Meta's research lab trained on brain scans of adult volunteers watching TV, predicts activity at 20,484 points on the brain's surface. A standard brain map picks 1,030 points linked to emotion and 851 linked to reasoning. The score, which we call the observable X, is the emotion average minus the reasoning average. Nobody was scanned: every value is a prediction.</a:t>
             </a:r>
           </a:p>
           <a:p/>
@@ -2199,7 +2214,7 @@
           </a:p>
           <a:p>
             <a:r>
-              <a:t>First result: the groups really differ. The measure is eta squared, 0.107. The ring shows what that means: about 11 percent of the differences between articles come from which group they are in, and the rest is article to article. The chance this is luck is about one in a billion, and the second run gave 0.089, both far above the 0.027 we could detect.</a:t>
+              <a:t>First result: the groups really differ. The measure is eta squared, the share of the variation explained by group: 0.107. The ring shows what that means: about 11 percent of the differences between articles come from which group they are in, and the rest is article to article. The chance this is luck is about one in a billion, and the second run gave 0.089, both far above the 0.027 we could detect.</a:t>
             </a:r>
           </a:p>
           <a:p/>
@@ -10549,7 +10564,7 @@
       </p:pic>
       <p:pic>
         <p:nvPicPr>
-          <p:cNvPr id="9" name="Picture 8" descr="5272f2755a3e4bf7.png"/>
+          <p:cNvPr id="9" name="Picture 8" descr="20c93cf97540e448.png"/>
           <p:cNvPicPr>
             <a:picLocks noChangeAspect="1"/>
           </p:cNvPicPr>
@@ -10563,8 +10578,8 @@
         </p:blipFill>
         <p:spPr>
           <a:xfrm>
-            <a:off x="1230325" y="2743200"/>
-            <a:ext cx="191109" cy="286664"/>
+            <a:off x="1181290" y="2542032"/>
+            <a:ext cx="152019" cy="247573"/>
           </a:xfrm>
           <a:prstGeom prst="rect">
             <a:avLst/>
@@ -10579,8 +10594,8 @@
         </p:nvSpPr>
         <p:spPr>
           <a:xfrm>
-            <a:off x="1920240" y="2697480"/>
-            <a:ext cx="3840480" cy="548640"/>
+            <a:off x="1783080" y="2487168"/>
+            <a:ext cx="4023360" cy="502920"/>
           </a:xfrm>
           <a:prstGeom prst="rect">
             <a:avLst/>
@@ -10599,20 +10614,29 @@
               </a:spcAft>
             </a:pPr>
             <a:r>
-              <a:rPr sz="1500" b="0" i="0">
+              <a:rPr sz="1300" b="1">
+                <a:solidFill>
+                  <a:srgbClr val="7CC4FF"/>
+                </a:solidFill>
+                <a:latin typeface="Calibri"/>
+              </a:rPr>
+              <a:t>external field  </a:t>
+            </a:r>
+            <a:r>
+              <a:rPr sz="1300" b="0">
                 <a:solidFill>
                   <a:srgbClr val="EEF3FA"/>
                 </a:solidFill>
                 <a:latin typeface="Calibri"/>
               </a:rPr>
-              <a:t>strength of the push per unit of score</a:t>
+              <a:t>= media's push on everyone</a:t>
             </a:r>
           </a:p>
         </p:txBody>
       </p:sp>
       <p:pic>
         <p:nvPicPr>
-          <p:cNvPr id="11" name="Picture 10" descr="3083b7f6cdc240b3.png"/>
+          <p:cNvPr id="11" name="Picture 10" descr="a2dd4f017e3f8d43.png"/>
           <p:cNvPicPr>
             <a:picLocks noChangeAspect="1"/>
           </p:cNvPicPr>
@@ -10626,8 +10650,8 @@
         </p:blipFill>
         <p:spPr>
           <a:xfrm>
-            <a:off x="1191348" y="3429000"/>
-            <a:ext cx="269062" cy="286664"/>
+            <a:off x="1144371" y="3063240"/>
+            <a:ext cx="225856" cy="247573"/>
           </a:xfrm>
           <a:prstGeom prst="rect">
             <a:avLst/>
@@ -10642,8 +10666,8 @@
         </p:nvSpPr>
         <p:spPr>
           <a:xfrm>
-            <a:off x="1920240" y="3383280"/>
-            <a:ext cx="3840480" cy="548640"/>
+            <a:off x="1783080" y="3008376"/>
+            <a:ext cx="4023360" cy="502920"/>
           </a:xfrm>
           <a:prstGeom prst="rect">
             <a:avLst/>
@@ -10662,20 +10686,29 @@
               </a:spcAft>
             </a:pPr>
             <a:r>
-              <a:rPr sz="1500" b="0" i="0">
+              <a:rPr sz="1300" b="1">
+                <a:solidFill>
+                  <a:srgbClr val="7CC4FF"/>
+                </a:solidFill>
+                <a:latin typeface="Calibri"/>
+              </a:rPr>
+              <a:t>observable  </a:t>
+            </a:r>
+            <a:r>
+              <a:rPr sz="1300" b="0">
                 <a:solidFill>
                   <a:srgbClr val="EEF3FA"/>
                 </a:solidFill>
                 <a:latin typeface="Calibri"/>
               </a:rPr>
-              <a:t>smallest push that flips the majority</a:t>
+              <a:t>= our score for an article</a:t>
             </a:r>
           </a:p>
         </p:txBody>
       </p:sp>
       <p:pic>
         <p:nvPicPr>
-          <p:cNvPr id="13" name="Picture 12" descr="92db4915de0152da.png"/>
+          <p:cNvPr id="13" name="Picture 12" descr="5272f2755a3e4bf7.png"/>
           <p:cNvPicPr>
             <a:picLocks noChangeAspect="1"/>
           </p:cNvPicPr>
@@ -10689,8 +10722,8 @@
         </p:blipFill>
         <p:spPr>
           <a:xfrm>
-            <a:off x="1146086" y="4114800"/>
-            <a:ext cx="359587" cy="289179"/>
+            <a:off x="1174775" y="3584448"/>
+            <a:ext cx="165049" cy="247573"/>
           </a:xfrm>
           <a:prstGeom prst="rect">
             <a:avLst/>
@@ -10705,8 +10738,8 @@
         </p:nvSpPr>
         <p:spPr>
           <a:xfrm>
-            <a:off x="1920240" y="4069080"/>
-            <a:ext cx="3840480" cy="548640"/>
+            <a:off x="1783080" y="3529584"/>
+            <a:ext cx="4023360" cy="502920"/>
           </a:xfrm>
           <a:prstGeom prst="rect">
             <a:avLst/>
@@ -10725,20 +10758,29 @@
               </a:spcAft>
             </a:pPr>
             <a:r>
-              <a:rPr sz="1500" b="0" i="0">
+              <a:rPr sz="1300" b="1">
+                <a:solidFill>
+                  <a:srgbClr val="7CC4FF"/>
+                </a:solidFill>
+                <a:latin typeface="Calibri"/>
+              </a:rPr>
+              <a:t>coupling constant  </a:t>
+            </a:r>
+            <a:r>
+              <a:rPr sz="1300" b="0">
                 <a:solidFill>
                   <a:srgbClr val="EEF3FA"/>
                 </a:solidFill>
                 <a:latin typeface="Calibri"/>
               </a:rPr>
-              <a:t>how strongly people copy each other</a:t>
+              <a:t>= push per unit of score</a:t>
             </a:r>
           </a:p>
         </p:txBody>
       </p:sp>
       <p:pic>
         <p:nvPicPr>
-          <p:cNvPr id="15" name="Picture 14" descr="4b880f26890debb7.png"/>
+          <p:cNvPr id="15" name="Picture 14" descr="3083b7f6cdc240b3.png"/>
           <p:cNvPicPr>
             <a:picLocks noChangeAspect="1"/>
           </p:cNvPicPr>
@@ -10752,8 +10794,8 @@
         </p:blipFill>
         <p:spPr>
           <a:xfrm>
-            <a:off x="1078191" y="4800600"/>
-            <a:ext cx="495376" cy="286664"/>
+            <a:off x="1141114" y="4105655"/>
+            <a:ext cx="232371" cy="247573"/>
           </a:xfrm>
           <a:prstGeom prst="rect">
             <a:avLst/>
@@ -10768,8 +10810,8 @@
         </p:nvSpPr>
         <p:spPr>
           <a:xfrm>
-            <a:off x="1920240" y="4754880"/>
-            <a:ext cx="3840480" cy="548640"/>
+            <a:off x="1783080" y="4050791"/>
+            <a:ext cx="4023360" cy="502920"/>
           </a:xfrm>
           <a:prstGeom prst="rect">
             <a:avLst/>
@@ -10788,20 +10830,173 @@
               </a:spcAft>
             </a:pPr>
             <a:r>
-              <a:rPr sz="1500" b="0" i="0">
+              <a:rPr sz="1300" b="1">
+                <a:solidFill>
+                  <a:srgbClr val="7CC4FF"/>
+                </a:solidFill>
+                <a:latin typeface="Calibri"/>
+              </a:rPr>
+              <a:t>critical field  </a:t>
+            </a:r>
+            <a:r>
+              <a:rPr sz="1300" b="0">
                 <a:solidFill>
                   <a:srgbClr val="EEF3FA"/>
                 </a:solidFill>
                 <a:latin typeface="Calibri"/>
               </a:rPr>
-              <a:t>spread of our scores = 0.124</a:t>
+              <a:t>= smallest push that flips the majority</a:t>
+            </a:r>
+          </a:p>
+        </p:txBody>
+      </p:sp>
+      <p:pic>
+        <p:nvPicPr>
+          <p:cNvPr id="17" name="Picture 16" descr="92db4915de0152da.png"/>
+          <p:cNvPicPr>
+            <a:picLocks noChangeAspect="1"/>
+          </p:cNvPicPr>
+          <p:nvPr/>
+        </p:nvPicPr>
+        <p:blipFill>
+          <a:blip r:embed="rId9"/>
+          <a:stretch>
+            <a:fillRect/>
+          </a:stretch>
+        </p:blipFill>
+        <p:spPr>
+          <a:xfrm>
+            <a:off x="1102023" y="4626864"/>
+            <a:ext cx="310553" cy="249745"/>
+          </a:xfrm>
+          <a:prstGeom prst="rect">
+            <a:avLst/>
+          </a:prstGeom>
+        </p:spPr>
+      </p:pic>
+      <p:sp>
+        <p:nvSpPr>
+          <p:cNvPr id="18" name="TextBox 17"/>
+          <p:cNvSpPr txBox="1"/>
+          <p:nvPr/>
+        </p:nvSpPr>
+        <p:spPr>
+          <a:xfrm>
+            <a:off x="1783080" y="4572000"/>
+            <a:ext cx="4023360" cy="502920"/>
+          </a:xfrm>
+          <a:prstGeom prst="rect">
+            <a:avLst/>
+          </a:prstGeom>
+          <a:noFill/>
+        </p:spPr>
+        <p:txBody>
+          <a:bodyPr wrap="square" anchor="ctr">
+            <a:spAutoFit/>
+          </a:bodyPr>
+          <a:lstStyle/>
+          <a:p>
+            <a:pPr algn="l">
+              <a:spcAft>
+                <a:spcPts val="0"/>
+              </a:spcAft>
+            </a:pPr>
+            <a:r>
+              <a:rPr sz="1300" b="1">
+                <a:solidFill>
+                  <a:srgbClr val="7CC4FF"/>
+                </a:solidFill>
+                <a:latin typeface="Calibri"/>
+              </a:rPr>
+              <a:t>reduced coupling  </a:t>
+            </a:r>
+            <a:r>
+              <a:rPr sz="1300" b="0">
+                <a:solidFill>
+                  <a:srgbClr val="EEF3FA"/>
+                </a:solidFill>
+                <a:latin typeface="Calibri"/>
+              </a:rPr>
+              <a:t>= how strongly people copy each other</a:t>
+            </a:r>
+          </a:p>
+        </p:txBody>
+      </p:sp>
+      <p:pic>
+        <p:nvPicPr>
+          <p:cNvPr id="19" name="Picture 18" descr="4b880f26890debb7.png"/>
+          <p:cNvPicPr>
+            <a:picLocks noChangeAspect="1"/>
+          </p:cNvPicPr>
+          <p:nvPr/>
+        </p:nvPicPr>
+        <p:blipFill>
+          <a:blip r:embed="rId10"/>
+          <a:stretch>
+            <a:fillRect/>
+          </a:stretch>
+        </p:blipFill>
+        <p:spPr>
+          <a:xfrm>
+            <a:off x="1043387" y="5148072"/>
+            <a:ext cx="427824" cy="247573"/>
+          </a:xfrm>
+          <a:prstGeom prst="rect">
+            <a:avLst/>
+          </a:prstGeom>
+        </p:spPr>
+      </p:pic>
+      <p:sp>
+        <p:nvSpPr>
+          <p:cNvPr id="20" name="TextBox 19"/>
+          <p:cNvSpPr txBox="1"/>
+          <p:nvPr/>
+        </p:nvSpPr>
+        <p:spPr>
+          <a:xfrm>
+            <a:off x="1783080" y="5093208"/>
+            <a:ext cx="4023360" cy="502920"/>
+          </a:xfrm>
+          <a:prstGeom prst="rect">
+            <a:avLst/>
+          </a:prstGeom>
+          <a:noFill/>
+        </p:spPr>
+        <p:txBody>
+          <a:bodyPr wrap="square" anchor="ctr">
+            <a:spAutoFit/>
+          </a:bodyPr>
+          <a:lstStyle/>
+          <a:p>
+            <a:pPr algn="l">
+              <a:spcAft>
+                <a:spcPts val="0"/>
+              </a:spcAft>
+            </a:pPr>
+            <a:r>
+              <a:rPr sz="1300" b="1">
+                <a:solidFill>
+                  <a:srgbClr val="7CC4FF"/>
+                </a:solidFill>
+                <a:latin typeface="Calibri"/>
+              </a:rPr>
+              <a:t>spread  </a:t>
+            </a:r>
+            <a:r>
+              <a:rPr sz="1300" b="0">
+                <a:solidFill>
+                  <a:srgbClr val="EEF3FA"/>
+                </a:solidFill>
+                <a:latin typeface="Calibri"/>
+              </a:rPr>
+              <a:t>= range of our scores = 0.124</a:t>
             </a:r>
           </a:p>
         </p:txBody>
       </p:sp>
       <p:graphicFrame>
         <p:nvGraphicFramePr>
-          <p:cNvPr id="17" name="Chart 16"/>
+          <p:cNvPr id="21" name="Chart 20"/>
           <p:cNvGraphicFramePr>
             <a:graphicFrameLocks noGrp="1"/>
           </p:cNvGraphicFramePr>
@@ -10813,13 +11008,13 @@
         </p:xfrm>
         <a:graphic>
           <a:graphicData uri="http://schemas.openxmlformats.org/drawingml/2006/chart">
-            <c:chart xmlns:c="http://schemas.openxmlformats.org/drawingml/2006/chart" r:id="rId9"/>
+            <c:chart xmlns:c="http://schemas.openxmlformats.org/drawingml/2006/chart" r:id="rId11"/>
           </a:graphicData>
         </a:graphic>
       </p:graphicFrame>
       <p:sp>
         <p:nvSpPr>
-          <p:cNvPr id="18" name="TextBox 17"/>
+          <p:cNvPr id="22" name="TextBox 21"/>
           <p:cNvSpPr txBox="1"/>
           <p:nvPr/>
         </p:nvSpPr>
@@ -10858,7 +11053,7 @@
       </p:sp>
       <p:sp>
         <p:nvSpPr>
-          <p:cNvPr id="19" name="TextBox 18"/>
+          <p:cNvPr id="23" name="TextBox 22"/>
           <p:cNvSpPr txBox="1"/>
           <p:nvPr/>
         </p:nvSpPr>
@@ -10897,7 +11092,7 @@
       </p:sp>
       <p:sp>
         <p:nvSpPr>
-          <p:cNvPr id="20" name="Rounded Rectangle 19"/>
+          <p:cNvPr id="24" name="Rounded Rectangle 23"/>
           <p:cNvSpPr/>
           <p:nvPr/>
         </p:nvSpPr>
@@ -10974,7 +11169,7 @@
       </p:sp>
       <p:sp>
         <p:nvSpPr>
-          <p:cNvPr id="21" name="TextBox 20"/>
+          <p:cNvPr id="25" name="TextBox 24"/>
           <p:cNvSpPr txBox="1"/>
           <p:nvPr/>
         </p:nvSpPr>
@@ -11013,7 +11208,7 @@
       </p:sp>
       <p:sp>
         <p:nvSpPr>
-          <p:cNvPr id="22" name="Rectangle 21"/>
+          <p:cNvPr id="26" name="Rectangle 25"/>
           <p:cNvSpPr/>
           <p:nvPr/>
         </p:nvSpPr>
@@ -11057,7 +11252,7 @@
       </p:sp>
       <p:sp>
         <p:nvSpPr>
-          <p:cNvPr id="23" name="Rectangle 22"/>
+          <p:cNvPr id="27" name="Rectangle 26"/>
           <p:cNvSpPr/>
           <p:nvPr/>
         </p:nvSpPr>
@@ -11101,7 +11296,7 @@
       </p:sp>
       <p:sp>
         <p:nvSpPr>
-          <p:cNvPr id="24" name="Rectangle 23"/>
+          <p:cNvPr id="28" name="Rectangle 27"/>
           <p:cNvSpPr/>
           <p:nvPr/>
         </p:nvSpPr>
@@ -11145,7 +11340,7 @@
       </p:sp>
       <p:sp>
         <p:nvSpPr>
-          <p:cNvPr id="25" name="Rectangle 24"/>
+          <p:cNvPr id="29" name="Rectangle 28"/>
           <p:cNvSpPr/>
           <p:nvPr/>
         </p:nvSpPr>
@@ -11189,7 +11384,7 @@
       </p:sp>
       <p:sp>
         <p:nvSpPr>
-          <p:cNvPr id="26" name="Rectangle 25"/>
+          <p:cNvPr id="30" name="Rectangle 29"/>
           <p:cNvSpPr/>
           <p:nvPr/>
         </p:nvSpPr>
@@ -11235,7 +11430,7 @@
       </p:sp>
       <p:sp>
         <p:nvSpPr>
-          <p:cNvPr id="27" name="TextBox 26"/>
+          <p:cNvPr id="31" name="TextBox 30"/>
           <p:cNvSpPr txBox="1"/>
           <p:nvPr/>
         </p:nvSpPr>
@@ -17654,8 +17849,8 @@
                 </a:solidFill>
                 <a:latin typeface="Calibri"/>
               </a:rPr>
-              <a:t>average opinion
-−1 all against · +1 all for</a:t>
+              <a:t>magnetisation
+= average opinion, −1 to +1</a:t>
             </a:r>
           </a:p>
         </p:txBody>
@@ -17766,8 +17961,8 @@
                 </a:solidFill>
                 <a:latin typeface="Calibri"/>
               </a:rPr>
-              <a:t>pull toward
-the people around you</a:t>
+              <a:t>coupling
+= pull toward neighbours</a:t>
             </a:r>
           </a:p>
         </p:txBody>
@@ -17878,8 +18073,8 @@
                 </a:solidFill>
                 <a:latin typeface="Calibri"/>
               </a:rPr>
-              <a:t>how firmly people
-follow that pull</a:t>
+              <a:t>inverse temperature
+= how firmly people follow</a:t>
             </a:r>
           </a:p>
         </p:txBody>
@@ -17990,8 +18185,8 @@
                 </a:solidFill>
                 <a:latin typeface="Calibri"/>
               </a:rPr>
-              <a:t>media's push,
-the same on everyone</a:t>
+              <a:t>external field
+= media's push on everyone</a:t>
             </a:r>
           </a:p>
         </p:txBody>

--- a/docs/defence/Monarch_Supervisor_Deck_Script.pptx
+++ b/docs/defence/Monarch_Supervisor_Deck_Script.pptx
@@ -1031,6 +1031,17 @@
               <a:t>- End with the four requests</a:t>
             </a:r>
           </a:p>
+          <a:p/>
+          <a:p>
+            <a:r>
+              <a:t>DEFINITIONS (if asked)</a:t>
+            </a:r>
+          </a:p>
+          <a:p>
+            <a:r>
+              <a:t>- Sociophysics: using the tools of statistical physics to model how groups of people behave.</a:t>
+            </a:r>
+          </a:p>
         </p:txBody>
       </p:sp>
       <p:sp>
@@ -1132,6 +1143,32 @@
               <a:t>- 3 bugs fixed</a:t>
             </a:r>
           </a:p>
+          <a:p/>
+          <a:p>
+            <a:r>
+              <a:t>DEFINITIONS (if asked)</a:t>
+            </a:r>
+          </a:p>
+          <a:p>
+            <a:r>
+              <a:t>- Noise ceiling: how well real brains predict each other; the best any model can do.</a:t>
+            </a:r>
+          </a:p>
+          <a:p>
+            <a:r>
+              <a:t>- r (Pearson correlation): how closely two signals rise and fall together; 0 none, 1 perfect.</a:t>
+            </a:r>
+          </a:p>
+          <a:p>
+            <a:r>
+              <a:t>- Algonauts 2025: a public brain-scan challenge using people watching Friends (the CNeuroMod recordings).</a:t>
+            </a:r>
+          </a:p>
+          <a:p>
+            <a:r>
+              <a:t>- Circular-shift test: shifting one signal in time many times to see how often chance gives a match this good.</a:t>
+            </a:r>
+          </a:p>
         </p:txBody>
       </p:sp>
       <p:sp>
@@ -1246,6 +1283,27 @@
           <a:p/>
           <a:p>
             <a:r>
+              <a:t>DEFINITIONS (if asked)</a:t>
+            </a:r>
+          </a:p>
+          <a:p>
+            <a:r>
+              <a:t>- Critical field: the smallest outside field that flips the magnetisation, here the majority opinion.</a:t>
+            </a:r>
+          </a:p>
+          <a:p>
+            <a:r>
+              <a:t>- Curie temperature: the temperature below which a magnet lines up by itself; for us, reduced coupling above 1.</a:t>
+            </a:r>
+          </a:p>
+          <a:p>
+            <a:r>
+              <a:t>- Lower bound: a minimum value; the result says alpha can't be smaller than this.</a:t>
+            </a:r>
+          </a:p>
+          <a:p/>
+          <a:p>
+            <a:r>
               <a:t>IF ASKED</a:t>
             </a:r>
           </a:p>
@@ -1364,6 +1422,17 @@
           <a:p/>
           <a:p>
             <a:r>
+              <a:t>DEFINITIONS (if asked)</a:t>
+            </a:r>
+          </a:p>
+          <a:p>
+            <a:r>
+              <a:t>- Ethics approval: formal permission from a review board before research involving people, required for children.</a:t>
+            </a:r>
+          </a:p>
+          <a:p/>
+          <a:p>
+            <a:r>
               <a:t>IF ASKED</a:t>
             </a:r>
           </a:p>
@@ -1485,6 +1554,22 @@
               <a:t>- 5 limits, each stated in the thesis</a:t>
             </a:r>
           </a:p>
+          <a:p/>
+          <a:p>
+            <a:r>
+              <a:t>DEFINITIONS (if asked)</a:t>
+            </a:r>
+          </a:p>
+          <a:p>
+            <a:r>
+              <a:t>- Crossed design: every source contributes every type of article, so source and type can be separated.</a:t>
+            </a:r>
+          </a:p>
+          <a:p>
+            <a:r>
+              <a:t>- Subcortical: structures deep in the brain, below the cortex.</a:t>
+            </a:r>
+          </a:p>
         </p:txBody>
       </p:sp>
       <p:sp>
@@ -1579,6 +1664,27 @@
           <a:p/>
           <a:p>
             <a:r>
+              <a:t>DEFINITIONS (if asked)</a:t>
+            </a:r>
+          </a:p>
+          <a:p>
+            <a:r>
+              <a:t>- Preprint: a paper shared publicly before peer review, for example on arXiv.</a:t>
+            </a:r>
+          </a:p>
+          <a:p>
+            <a:r>
+              <a:t>- Physica A: a peer-reviewed journal for statistical physics, including sociophysics.</a:t>
+            </a:r>
+          </a:p>
+          <a:p>
+            <a:r>
+              <a:t>- Imaging Neuroscience: a peer-reviewed journal for brain imaging methods.</a:t>
+            </a:r>
+          </a:p>
+          <a:p/>
+          <a:p>
+            <a:r>
               <a:t>IF ASKED</a:t>
             </a:r>
           </a:p>
@@ -1590,6 +1696,17 @@
           <a:p>
             <a:r>
               <a:t>A: It's a real risk for any content measure. That's why it reports group results only, for research, and the model's licence is non-commercial.</a:t>
+            </a:r>
+          </a:p>
+          <a:p/>
+          <a:p>
+            <a:r>
+              <a:t>Q: Why didn't you use Kenyan media?</a:t>
+            </a:r>
+          </a:p>
+          <a:p>
+            <a:r>
+              <a:t>A: Cost. Each article takes about 70 seconds of GPU time and every article was scanned twice, so the 400 articles alone used about 16 GPU hours of the free Kaggle allowance, which ran out mid-project and had to reset on 15 August. A Kenyan set would also have to be collected and labelled by hand, because no ready-made labelled set of manipulative and neutral Kenyan articles was available to us, and hand-labelling needs paid annotators. With no funding, public labelled collections were the only affordable choice. The Kenyan case, coverage of the 2024 Finance Bill, is the first extension once there is funding.</a:t>
             </a:r>
           </a:p>
         </p:txBody>
@@ -1683,6 +1800,17 @@
               <a:t>- Clearance by Mon 28 Sep</a:t>
             </a:r>
           </a:p>
+          <a:p/>
+          <a:p>
+            <a:r>
+              <a:t>DEFINITIONS (if asked)</a:t>
+            </a:r>
+          </a:p>
+          <a:p>
+            <a:r>
+              <a:t>- Library deposit: submitting the bound thesis to the university library, needed for graduation clearance.</a:t>
+            </a:r>
+          </a:p>
         </p:txBody>
       </p:sp>
       <p:sp>
@@ -1784,6 +1912,32 @@
               <a:t>- h = external field = media's push on everyone</a:t>
             </a:r>
           </a:p>
+          <a:p/>
+          <a:p>
+            <a:r>
+              <a:t>DEFINITIONS (if asked)</a:t>
+            </a:r>
+          </a:p>
+          <a:p>
+            <a:r>
+              <a:t>- Ising model: a model of magnets where each spin points up or down and prefers to match its neighbours; used here for two-sided opinions.</a:t>
+            </a:r>
+          </a:p>
+          <a:p>
+            <a:r>
+              <a:t>- Mean field: each person feels the average of the whole group, not particular neighbours; it makes the maths solvable.</a:t>
+            </a:r>
+          </a:p>
+          <a:p>
+            <a:r>
+              <a:t>- Spin: the up or down state of one atom; here, one person's opinion.</a:t>
+            </a:r>
+          </a:p>
+          <a:p>
+            <a:r>
+              <a:t>- tanh: a smooth S-shaped function that keeps the magnetisation between -1 and +1.</a:t>
+            </a:r>
+          </a:p>
         </p:txBody>
       </p:sp>
       <p:sp>
@@ -1878,6 +2032,27 @@
           <a:p/>
           <a:p>
             <a:r>
+              <a:t>DEFINITIONS (if asked)</a:t>
+            </a:r>
+          </a:p>
+          <a:p>
+            <a:r>
+              <a:t>- Amygdala: a small structure deep in the brain linked to fear and threat.</a:t>
+            </a:r>
+          </a:p>
+          <a:p>
+            <a:r>
+              <a:t>- Cortex: the brain's outer surface layer, where the model makes its predictions.</a:t>
+            </a:r>
+          </a:p>
+          <a:p>
+            <a:r>
+              <a:t>- Amendment: the approved change to the proposal's scope and title.</a:t>
+            </a:r>
+          </a:p>
+          <a:p/>
+          <a:p>
+            <a:r>
               <a:t>IF ASKED</a:t>
             </a:r>
           </a:p>
@@ -1963,7 +2138,7 @@
           </a:p>
           <a:p>
             <a:r>
-              <a:t>This is how one article becomes one number. The article is read aloud by a text-to-speech voice, because the brain model was built on people listening. A timing tool marks when each word is said. Then TRIBE v2, a model from Meta's research lab trained on brain scans of adult volunteers watching TV, predicts activity at 20,484 points on the brain's surface. A standard brain map picks 1,030 points linked to emotion and 851 linked to reasoning. The score, which we call the observable X, is the emotion average minus the reasoning average. Nobody was scanned: every value is a prediction.</a:t>
+              <a:t>This is how one article becomes one number. The article is read aloud by a text-to-speech voice, because the brain model was built on people listening. A timing tool marks when each word is said. Then TRIBE v2, a model from Meta's research lab trained on brain scans of adult volunteers watching TV, predicts activity at 20,484 points on the brain's surface. A standard brain map picks 1,030 points linked to emotion and 851 linked to reasoning. The score, which we call the observable X, is the emotion average minus the reasoning average. Nobody was scanned: every value is a prediction. On the left is the live tool, at monarch-4iy.pages.dev: this article scores plus 0.054, the highest in the corpus. Anyone can open it and check any article.</a:t>
             </a:r>
           </a:p>
           <a:p/>
@@ -1985,6 +2160,47 @@
           <a:p>
             <a:r>
               <a:t>- About 70 seconds per article on a free Kaggle GPU</a:t>
+            </a:r>
+          </a:p>
+          <a:p/>
+          <a:p>
+            <a:r>
+              <a:t>DEFINITIONS (if asked)</a:t>
+            </a:r>
+          </a:p>
+          <a:p>
+            <a:r>
+              <a:t>- TRIBE v2: Meta's published brain encoder: it predicts fMRI responses from text, audio and video.</a:t>
+            </a:r>
+          </a:p>
+          <a:p>
+            <a:r>
+              <a:t>- fMRI: brain scanning that tracks blood flow as a stand-in for activity.</a:t>
+            </a:r>
+          </a:p>
+          <a:p>
+            <a:r>
+              <a:t>- Encoder: a model that maps a stimulus to a predicted brain response.</a:t>
+            </a:r>
+          </a:p>
+          <a:p>
+            <a:r>
+              <a:t>- Forced alignment: finding the exact time each word is spoken in the audio.</a:t>
+            </a:r>
+          </a:p>
+          <a:p>
+            <a:r>
+              <a:t>- fsaverage5: a standard brain surface with 20,484 points, 10,242 per hemisphere.</a:t>
+            </a:r>
+          </a:p>
+          <a:p>
+            <a:r>
+              <a:t>- HCP atlas (Glasser 2016): a standard map dividing the cortex into named areas.</a:t>
+            </a:r>
+          </a:p>
+          <a:p>
+            <a:r>
+              <a:t>- Cortical proxy: a measure built from predicted surface activity; it rates content, not people.</a:t>
             </a:r>
           </a:p>
           <a:p/>
@@ -2129,6 +2345,27 @@
           <a:p/>
           <a:p>
             <a:r>
+              <a:t>DEFINITIONS (if asked)</a:t>
+            </a:r>
+          </a:p>
+          <a:p>
+            <a:r>
+              <a:t>- Corpus: the collection of articles studied.</a:t>
+            </a:r>
+          </a:p>
+          <a:p>
+            <a:r>
+              <a:t>- Power analysis: working out in advance how big a study must be to detect an effect of a given size.</a:t>
+            </a:r>
+          </a:p>
+          <a:p>
+            <a:r>
+              <a:t>- Length-matched: groups have the same average word count, so length can't explain a difference.</a:t>
+            </a:r>
+          </a:p>
+          <a:p/>
+          <a:p>
+            <a:r>
               <a:t>IF ASKED</a:t>
             </a:r>
           </a:p>
@@ -2140,6 +2377,17 @@
           <a:p>
             <a:r>
               <a:t>A: We calculated before scanning that 400 detects an effect of 0.027. Each article costs about a minute of GPU time, and we ran them twice.</a:t>
+            </a:r>
+          </a:p>
+          <a:p/>
+          <a:p>
+            <a:r>
+              <a:t>Q: Why didn't you use Kenyan media?</a:t>
+            </a:r>
+          </a:p>
+          <a:p>
+            <a:r>
+              <a:t>A: Cost. Each article takes about 70 seconds of GPU time and every article was scanned twice, so the 400 articles alone used about 16 GPU hours of the free Kaggle allowance, which ran out mid-project and had to reset on 15 August. A Kenyan set would also have to be collected and labelled by hand, because no ready-made labelled set of manipulative and neutral Kenyan articles was available to us, and hand-labelling needs paid annotators. With no funding, public labelled collections were the only affordable choice. The Kenyan case, coverage of the 2024 Finance Bill, is the first extension once there is funding.</a:t>
             </a:r>
           </a:p>
         </p:txBody>
@@ -2238,6 +2486,27 @@
               <a:t>- Second run 0.089</a:t>
             </a:r>
           </a:p>
+          <a:p/>
+          <a:p>
+            <a:r>
+              <a:t>DEFINITIONS (if asked)</a:t>
+            </a:r>
+          </a:p>
+          <a:p>
+            <a:r>
+              <a:t>- η² (eta squared): share of the total variation explained by group membership.</a:t>
+            </a:r>
+          </a:p>
+          <a:p>
+            <a:r>
+              <a:t>- F-statistic: the ANOVA test value comparing variation between groups with variation within groups; ours is 15.779.</a:t>
+            </a:r>
+          </a:p>
+          <a:p>
+            <a:r>
+              <a:t>- p-value: the chance of a result at least this strong if there were truly no difference.</a:t>
+            </a:r>
+          </a:p>
         </p:txBody>
       </p:sp>
       <p:sp>
@@ -2334,6 +2603,22 @@
               <a:t>- Fear: emotion +0.61, reasoning -0.10</a:t>
             </a:r>
           </a:p>
+          <a:p/>
+          <a:p>
+            <a:r>
+              <a:t>DEFINITIONS (if asked)</a:t>
+            </a:r>
+          </a:p>
+          <a:p>
+            <a:r>
+              <a:t>- Cohen's d: the difference between two group averages divided by the typical spread; 0.2 small, 0.5 medium, 0.8 large.</a:t>
+            </a:r>
+          </a:p>
+          <a:p>
+            <a:r>
+              <a:t>- Welch's t-test: a test comparing two group averages that does not assume equal spreads.</a:t>
+            </a:r>
+          </a:p>
         </p:txBody>
       </p:sp>
       <p:sp>
@@ -2425,6 +2710,27 @@
               <a:t>- 51 flipped, 55 expected (44 to 67)</a:t>
             </a:r>
           </a:p>
+          <a:p/>
+          <a:p>
+            <a:r>
+              <a:t>DEFINITIONS (if asked)</a:t>
+            </a:r>
+          </a:p>
+          <a:p>
+            <a:r>
+              <a:t>- ICC (intraclass correlation): agreement between repeated measurements of the same items; 1 is identical.</a:t>
+            </a:r>
+          </a:p>
+          <a:p>
+            <a:r>
+              <a:t>- Test-retest: measuring the same thing twice to check it repeats.</a:t>
+            </a:r>
+          </a:p>
+          <a:p>
+            <a:r>
+              <a:t>- Sign reversal: a score that is positive on one run and negative on the other.</a:t>
+            </a:r>
+          </a:p>
         </p:txBody>
       </p:sp>
       <p:sp>
@@ -2514,6 +2820,37 @@
           <a:p>
             <a:r>
               <a:t>- Words guess the source 66% vs 25% chance</a:t>
+            </a:r>
+          </a:p>
+          <a:p/>
+          <a:p>
+            <a:r>
+              <a:t>DEFINITIONS (if asked)</a:t>
+            </a:r>
+          </a:p>
+          <a:p>
+            <a:r>
+              <a:t>- AUC: the chance that a randomly chosen manipulative article scores higher than a randomly chosen neutral one; 0.5 is a coin toss.</a:t>
+            </a:r>
+          </a:p>
+          <a:p>
+            <a:r>
+              <a:t>- TF-IDF: a word-counting method that weights words by how distinctive they are.</a:t>
+            </a:r>
+          </a:p>
+          <a:p>
+            <a:r>
+              <a:t>- Logistic regression: a simple model that turns word counts into a probability.</a:t>
+            </a:r>
+          </a:p>
+          <a:p>
+            <a:r>
+              <a:t>- VADER: a standard sentiment tool that scores text as positive or negative.</a:t>
+            </a:r>
+          </a:p>
+          <a:p>
+            <a:r>
+              <a:t>- Confound: a second factor, here the source, that moves with the one you study, so the two can't be separated.</a:t>
             </a:r>
           </a:p>
           <a:p/>
@@ -15177,7 +15514,7 @@
                 </a:solidFill>
                 <a:latin typeface="Calibri"/>
               </a:rPr>
-              <a:t>Kenya: 2024 Finance Bill coverage</a:t>
+              <a:t>Kenya: 2024 Finance Bill (funding)</a:t>
             </a:r>
           </a:p>
         </p:txBody>
@@ -22281,7 +22618,7 @@
         <p:spPr>
           <a:xfrm>
             <a:off x="685800" y="1325880"/>
-            <a:ext cx="1938528" cy="1371600"/>
+            <a:ext cx="1938528" cy="1188720"/>
           </a:xfrm>
           <a:prstGeom prst="roundRect">
             <a:avLst>
@@ -22336,8 +22673,8 @@
         </p:blipFill>
         <p:spPr>
           <a:xfrm>
-            <a:off x="1453896" y="1463040"/>
-            <a:ext cx="402336" cy="402336"/>
+            <a:off x="1472184" y="1417320"/>
+            <a:ext cx="365760" cy="365760"/>
           </a:xfrm>
           <a:prstGeom prst="rect">
             <a:avLst/>
@@ -22352,8 +22689,8 @@
         </p:nvSpPr>
         <p:spPr>
           <a:xfrm>
-            <a:off x="685800" y="1920240"/>
-            <a:ext cx="1938528" cy="731520"/>
+            <a:off x="685800" y="1810512"/>
+            <a:ext cx="1938528" cy="685800"/>
           </a:xfrm>
           <a:prstGeom prst="rect">
             <a:avLst/>
@@ -22407,7 +22744,7 @@
         </p:nvSpPr>
         <p:spPr>
           <a:xfrm>
-            <a:off x="2670048" y="1938528"/>
+            <a:off x="2670048" y="1847088"/>
             <a:ext cx="192024" cy="146304"/>
           </a:xfrm>
           <a:prstGeom prst="rightArrow">
@@ -22452,7 +22789,7 @@
         <p:spPr>
           <a:xfrm>
             <a:off x="2907792" y="1325880"/>
-            <a:ext cx="1938528" cy="1371600"/>
+            <a:ext cx="1938528" cy="1188720"/>
           </a:xfrm>
           <a:prstGeom prst="roundRect">
             <a:avLst>
@@ -22507,8 +22844,8 @@
         </p:blipFill>
         <p:spPr>
           <a:xfrm>
-            <a:off x="3675888" y="1463040"/>
-            <a:ext cx="402336" cy="402336"/>
+            <a:off x="3694176" y="1417320"/>
+            <a:ext cx="365760" cy="365760"/>
           </a:xfrm>
           <a:prstGeom prst="rect">
             <a:avLst/>
@@ -22523,8 +22860,8 @@
         </p:nvSpPr>
         <p:spPr>
           <a:xfrm>
-            <a:off x="2907792" y="1920240"/>
-            <a:ext cx="1938528" cy="731520"/>
+            <a:off x="2907792" y="1810512"/>
+            <a:ext cx="1938528" cy="685800"/>
           </a:xfrm>
           <a:prstGeom prst="rect">
             <a:avLst/>
@@ -22578,7 +22915,7 @@
         </p:nvSpPr>
         <p:spPr>
           <a:xfrm>
-            <a:off x="4892040" y="1938528"/>
+            <a:off x="4892040" y="1847088"/>
             <a:ext cx="192024" cy="146304"/>
           </a:xfrm>
           <a:prstGeom prst="rightArrow">
@@ -22623,7 +22960,7 @@
         <p:spPr>
           <a:xfrm>
             <a:off x="5129784" y="1325880"/>
-            <a:ext cx="1938528" cy="1371600"/>
+            <a:ext cx="1938528" cy="1188720"/>
           </a:xfrm>
           <a:prstGeom prst="roundRect">
             <a:avLst>
@@ -22678,8 +23015,8 @@
         </p:blipFill>
         <p:spPr>
           <a:xfrm>
-            <a:off x="5897880" y="1463040"/>
-            <a:ext cx="402336" cy="402336"/>
+            <a:off x="5916168" y="1417320"/>
+            <a:ext cx="365760" cy="365760"/>
           </a:xfrm>
           <a:prstGeom prst="rect">
             <a:avLst/>
@@ -22694,8 +23031,8 @@
         </p:nvSpPr>
         <p:spPr>
           <a:xfrm>
-            <a:off x="5129784" y="1920240"/>
-            <a:ext cx="1938528" cy="731520"/>
+            <a:off x="5129784" y="1810512"/>
+            <a:ext cx="1938528" cy="685800"/>
           </a:xfrm>
           <a:prstGeom prst="rect">
             <a:avLst/>
@@ -22749,7 +23086,7 @@
         </p:nvSpPr>
         <p:spPr>
           <a:xfrm>
-            <a:off x="7114032" y="1938528"/>
+            <a:off x="7114032" y="1847088"/>
             <a:ext cx="192024" cy="146304"/>
           </a:xfrm>
           <a:prstGeom prst="rightArrow">
@@ -22794,7 +23131,7 @@
         <p:spPr>
           <a:xfrm>
             <a:off x="7351776" y="1325880"/>
-            <a:ext cx="1938528" cy="1371600"/>
+            <a:ext cx="1938528" cy="1188720"/>
           </a:xfrm>
           <a:prstGeom prst="roundRect">
             <a:avLst>
@@ -22849,8 +23186,8 @@
         </p:blipFill>
         <p:spPr>
           <a:xfrm>
-            <a:off x="8119872" y="1463040"/>
-            <a:ext cx="402336" cy="402336"/>
+            <a:off x="8138160" y="1417320"/>
+            <a:ext cx="365760" cy="365760"/>
           </a:xfrm>
           <a:prstGeom prst="rect">
             <a:avLst/>
@@ -22865,8 +23202,8 @@
         </p:nvSpPr>
         <p:spPr>
           <a:xfrm>
-            <a:off x="7351776" y="1920240"/>
-            <a:ext cx="1938528" cy="731520"/>
+            <a:off x="7351776" y="1810512"/>
+            <a:ext cx="1938528" cy="685800"/>
           </a:xfrm>
           <a:prstGeom prst="rect">
             <a:avLst/>
@@ -22920,7 +23257,7 @@
         </p:nvSpPr>
         <p:spPr>
           <a:xfrm>
-            <a:off x="9336024" y="1938528"/>
+            <a:off x="9336024" y="1847088"/>
             <a:ext cx="192024" cy="146304"/>
           </a:xfrm>
           <a:prstGeom prst="rightArrow">
@@ -22965,7 +23302,7 @@
         <p:spPr>
           <a:xfrm>
             <a:off x="9573768" y="1325880"/>
-            <a:ext cx="1938528" cy="1371600"/>
+            <a:ext cx="1938528" cy="1188720"/>
           </a:xfrm>
           <a:prstGeom prst="roundRect">
             <a:avLst>
@@ -23020,8 +23357,8 @@
         </p:blipFill>
         <p:spPr>
           <a:xfrm>
-            <a:off x="10341864" y="1463040"/>
-            <a:ext cx="402336" cy="402336"/>
+            <a:off x="10360152" y="1417320"/>
+            <a:ext cx="365760" cy="365760"/>
           </a:xfrm>
           <a:prstGeom prst="rect">
             <a:avLst/>
@@ -23036,8 +23373,8 @@
         </p:nvSpPr>
         <p:spPr>
           <a:xfrm>
-            <a:off x="9573768" y="1920240"/>
-            <a:ext cx="1938528" cy="731520"/>
+            <a:off x="9573768" y="1810512"/>
+            <a:ext cx="1938528" cy="685800"/>
           </a:xfrm>
           <a:prstGeom prst="rect">
             <a:avLst/>
@@ -23091,47 +23428,49 @@
         </p:nvSpPr>
         <p:spPr>
           <a:xfrm>
-            <a:off x="685800" y="2953512"/>
-            <a:ext cx="5340096" cy="2523744"/>
+            <a:off x="685800" y="2697480"/>
+            <a:ext cx="4846320" cy="2880360"/>
           </a:xfrm>
           <a:prstGeom prst="roundRect">
             <a:avLst>
-              <a:gd name="adj" fmla="val 4000"/>
+              <a:gd name="adj" fmla="val 6000"/>
             </a:avLst>
           </a:prstGeom>
           <a:solidFill>
-            <a:srgbClr val="FFFFFF"/>
-          </a:solidFill>
-          <a:ln>
-            <a:noFill/>
-          </a:ln>
-          <a:effectLst/>
-        </p:spPr>
-        <p:style>
-          <a:lnRef idx="1">
-            <a:schemeClr val="accent1"/>
-          </a:lnRef>
-          <a:fillRef idx="3">
-            <a:schemeClr val="accent1"/>
-          </a:fillRef>
-          <a:effectRef idx="2">
-            <a:schemeClr val="accent1"/>
-          </a:effectRef>
-          <a:fontRef idx="minor">
-            <a:schemeClr val="lt1"/>
-          </a:fontRef>
-        </p:style>
-        <p:txBody>
-          <a:bodyPr rtlCol="0" anchor="ctr"/>
-          <a:lstStyle/>
-          <a:p>
-            <a:pPr algn="ctr"/>
+            <a:srgbClr val="12223C"/>
+          </a:solidFill>
+          <a:ln w="25400">
+            <a:solidFill>
+              <a:srgbClr val="7CC4FF"/>
+            </a:solidFill>
+          </a:ln>
+          <a:effectLst/>
+        </p:spPr>
+        <p:style>
+          <a:lnRef idx="1">
+            <a:schemeClr val="accent1"/>
+          </a:lnRef>
+          <a:fillRef idx="3">
+            <a:schemeClr val="accent1"/>
+          </a:fillRef>
+          <a:effectRef idx="2">
+            <a:schemeClr val="accent1"/>
+          </a:effectRef>
+          <a:fontRef idx="minor">
+            <a:schemeClr val="lt1"/>
+          </a:fontRef>
+        </p:style>
+        <p:txBody>
+          <a:bodyPr rtlCol="0" anchor="t" wrap="square" lIns="201168" rIns="201168" tIns="109728" bIns="109728"/>
+          <a:lstStyle/>
+          <a:p>
+            <a:pPr algn="l"/>
           </a:p>
         </p:txBody>
       </p:sp>
       <p:pic>
         <p:nvPicPr>
-          <p:cNvPr id="27" name="Picture 26" descr="B1_roi_definition.png"/>
+          <p:cNvPr id="27" name="Picture 26" descr="instrument_article.png"/>
           <p:cNvPicPr>
             <a:picLocks noChangeAspect="1"/>
           </p:cNvPicPr>
@@ -23145,8 +23484,8 @@
         </p:blipFill>
         <p:spPr>
           <a:xfrm>
-            <a:off x="795528" y="3063240"/>
-            <a:ext cx="5120640" cy="2304288"/>
+            <a:off x="777240" y="2770632"/>
+            <a:ext cx="4663440" cy="2772856"/>
           </a:xfrm>
           <a:prstGeom prst="rect">
             <a:avLst/>
@@ -23161,8 +23500,8 @@
         </p:nvSpPr>
         <p:spPr>
           <a:xfrm>
-            <a:off x="685800" y="5440680"/>
-            <a:ext cx="5486400" cy="320040"/>
+            <a:off x="685800" y="5605272"/>
+            <a:ext cx="4937760" cy="457200"/>
           </a:xfrm>
           <a:prstGeom prst="rect">
             <a:avLst/>
@@ -23181,40 +23520,22 @@
               </a:spcAft>
             </a:pPr>
             <a:r>
-              <a:rPr sz="1300" b="1">
-                <a:solidFill>
-                  <a:srgbClr val="FF7A59"/>
-                </a:solidFill>
-                <a:latin typeface="Calibri"/>
-              </a:rPr>
-              <a:t>orange </a:t>
-            </a:r>
-            <a:r>
-              <a:rPr sz="1300" b="0">
+              <a:rPr sz="1100" b="1">
                 <a:solidFill>
                   <a:srgbClr val="EEF3FA"/>
                 </a:solidFill>
                 <a:latin typeface="Calibri"/>
               </a:rPr>
-              <a:t>1,030 emotion points   </a:t>
-            </a:r>
-            <a:r>
-              <a:rPr sz="1300" b="1">
+              <a:t>The live tool, one article: </a:t>
+            </a:r>
+            <a:r>
+              <a:rPr sz="1100" b="0">
                 <a:solidFill>
-                  <a:srgbClr val="7CC4FF"/>
+                  <a:srgbClr val="9AABC4"/>
                 </a:solidFill>
                 <a:latin typeface="Calibri"/>
               </a:rPr>
-              <a:t>blue </a:t>
-            </a:r>
-            <a:r>
-              <a:rPr sz="1300" b="0">
-                <a:solidFill>
-                  <a:srgbClr val="EEF3FA"/>
-                </a:solidFill>
-                <a:latin typeface="Calibri"/>
-              </a:rPr>
-              <a:t>851 reasoning points</a:t>
+              <a:t>emotion +0.109, reasoning +0.055, score +0.054, the highest in the corpus.</a:t>
             </a:r>
           </a:p>
         </p:txBody>
@@ -23227,8 +23548,8 @@
         </p:nvSpPr>
         <p:spPr>
           <a:xfrm>
-            <a:off x="6446520" y="2971800"/>
-            <a:ext cx="5056632" cy="1874519"/>
+            <a:off x="5760720" y="2697480"/>
+            <a:ext cx="5742432" cy="1783080"/>
           </a:xfrm>
           <a:prstGeom prst="roundRect">
             <a:avLst>
@@ -23275,7 +23596,7 @@
         </p:nvSpPr>
         <p:spPr>
           <a:xfrm>
-            <a:off x="6629400" y="3063240"/>
+            <a:off x="5943600" y="2770632"/>
             <a:ext cx="4572000" cy="274320"/>
           </a:xfrm>
           <a:prstGeom prst="rect">
@@ -23301,7 +23622,7 @@
                 </a:solidFill>
                 <a:latin typeface="Calibri"/>
               </a:rPr>
-              <a:t>THE SCORE</a:t>
+              <a:t>THE SCORE, X</a:t>
             </a:r>
           </a:p>
         </p:txBody>
@@ -23322,8 +23643,8 @@
         </p:blipFill>
         <p:spPr>
           <a:xfrm>
-            <a:off x="7429042" y="3383280"/>
-            <a:ext cx="3091586" cy="395020"/>
+            <a:off x="7214958" y="3017520"/>
+            <a:ext cx="2833954" cy="362102"/>
           </a:xfrm>
           <a:prstGeom prst="rect">
             <a:avLst/>
@@ -23338,8 +23659,8 @@
         </p:nvSpPr>
         <p:spPr>
           <a:xfrm>
-            <a:off x="6720840" y="4343400"/>
-            <a:ext cx="2240280" cy="91440"/>
+            <a:off x="6035040" y="3767328"/>
+            <a:ext cx="2560320" cy="91440"/>
           </a:xfrm>
           <a:prstGeom prst="rect">
             <a:avLst/>
@@ -23382,8 +23703,8 @@
         </p:nvSpPr>
         <p:spPr>
           <a:xfrm>
-            <a:off x="8988552" y="4343400"/>
-            <a:ext cx="2240280" cy="91440"/>
+            <a:off x="8622792" y="3767328"/>
+            <a:ext cx="2560320" cy="91440"/>
           </a:xfrm>
           <a:prstGeom prst="rect">
             <a:avLst/>
@@ -23426,7 +23747,7 @@
         </p:nvSpPr>
         <p:spPr>
           <a:xfrm>
-            <a:off x="8961120" y="4224528"/>
+            <a:off x="8595360" y="3648456"/>
             <a:ext cx="27432" cy="329184"/>
           </a:xfrm>
           <a:prstGeom prst="rect">
@@ -23470,8 +23791,8 @@
         </p:nvSpPr>
         <p:spPr>
           <a:xfrm>
-            <a:off x="6720840" y="4480560"/>
-            <a:ext cx="2240280" cy="274320"/>
+            <a:off x="6035040" y="3877056"/>
+            <a:ext cx="2560320" cy="274320"/>
           </a:xfrm>
           <a:prstGeom prst="rect">
             <a:avLst/>
@@ -23509,8 +23830,8 @@
         </p:nvSpPr>
         <p:spPr>
           <a:xfrm>
-            <a:off x="8988552" y="4480560"/>
-            <a:ext cx="2240280" cy="274320"/>
+            <a:off x="8622792" y="3877056"/>
+            <a:ext cx="2560320" cy="274320"/>
           </a:xfrm>
           <a:prstGeom prst="rect">
             <a:avLst/>
@@ -23548,8 +23869,8 @@
         </p:nvSpPr>
         <p:spPr>
           <a:xfrm>
-            <a:off x="8686800" y="4480560"/>
-            <a:ext cx="548640" cy="274320"/>
+            <a:off x="5943600" y="4133087"/>
+            <a:ext cx="5394960" cy="274320"/>
           </a:xfrm>
           <a:prstGeom prst="rect">
             <a:avLst/>
@@ -23568,60 +23889,144 @@
               </a:spcAft>
             </a:pPr>
             <a:r>
-              <a:rPr sz="1200" b="0" i="0">
+              <a:rPr sz="1100" b="0" i="0">
+                <a:solidFill>
+                  <a:srgbClr val="9AABC4"/>
+                </a:solidFill>
+                <a:latin typeface="Calibri"/>
+              </a:rPr>
+              <a:t>emotion areas: 1,030 points  ·  reasoning areas: 851 points  ·  nobody scanned</a:t>
+            </a:r>
+          </a:p>
+        </p:txBody>
+      </p:sp>
+      <p:sp>
+        <p:nvSpPr>
+          <p:cNvPr id="38" name="Rounded Rectangle 37">
+            <a:hlinkClick r:id="rId10"/>
+          </p:cNvPr>
+          <p:cNvSpPr/>
+          <p:nvPr/>
+        </p:nvSpPr>
+        <p:spPr>
+          <a:xfrm>
+            <a:off x="5760720" y="4617720"/>
+            <a:ext cx="5742432" cy="960120"/>
+          </a:xfrm>
+          <a:prstGeom prst="roundRect">
+            <a:avLst>
+              <a:gd name="adj" fmla="val 6000"/>
+            </a:avLst>
+          </a:prstGeom>
+          <a:solidFill>
+            <a:srgbClr val="12223C"/>
+          </a:solidFill>
+          <a:ln w="25400">
+            <a:solidFill>
+              <a:srgbClr val="F5B83D"/>
+            </a:solidFill>
+          </a:ln>
+          <a:effectLst/>
+        </p:spPr>
+        <p:style>
+          <a:lnRef idx="1">
+            <a:schemeClr val="accent1"/>
+          </a:lnRef>
+          <a:fillRef idx="3">
+            <a:schemeClr val="accent1"/>
+          </a:fillRef>
+          <a:effectRef idx="2">
+            <a:schemeClr val="accent1"/>
+          </a:effectRef>
+          <a:fontRef idx="minor">
+            <a:schemeClr val="lt1"/>
+          </a:fontRef>
+        </p:style>
+        <p:txBody>
+          <a:bodyPr rtlCol="0" anchor="t" wrap="square" lIns="201168" rIns="201168" tIns="109728" bIns="109728"/>
+          <a:lstStyle/>
+          <a:p>
+            <a:pPr algn="l"/>
+          </a:p>
+        </p:txBody>
+      </p:sp>
+      <p:pic>
+        <p:nvPicPr>
+          <p:cNvPr id="39" name="Picture 38" descr="target.png"/>
+          <p:cNvPicPr>
+            <a:picLocks noChangeAspect="1"/>
+          </p:cNvPicPr>
+          <p:nvPr/>
+        </p:nvPicPr>
+        <p:blipFill>
+          <a:blip r:embed="rId7"/>
+          <a:stretch>
+            <a:fillRect/>
+          </a:stretch>
+        </p:blipFill>
+        <p:spPr>
+          <a:xfrm>
+            <a:off x="5943600" y="4873752"/>
+            <a:ext cx="420624" cy="420624"/>
+          </a:xfrm>
+          <a:prstGeom prst="rect">
+            <a:avLst/>
+          </a:prstGeom>
+        </p:spPr>
+      </p:pic>
+      <p:sp>
+        <p:nvSpPr>
+          <p:cNvPr id="40" name="TextBox 39"/>
+          <p:cNvSpPr txBox="1"/>
+          <p:nvPr/>
+        </p:nvSpPr>
+        <p:spPr>
+          <a:xfrm>
+            <a:off x="6537960" y="4663440"/>
+            <a:ext cx="4846320" cy="914400"/>
+          </a:xfrm>
+          <a:prstGeom prst="rect">
+            <a:avLst/>
+          </a:prstGeom>
+          <a:noFill/>
+        </p:spPr>
+        <p:txBody>
+          <a:bodyPr wrap="square" anchor="ctr">
+            <a:spAutoFit/>
+          </a:bodyPr>
+          <a:lstStyle/>
+          <a:p>
+            <a:pPr algn="l">
+              <a:spcAft>
+                <a:spcPts val="0"/>
+              </a:spcAft>
+            </a:pPr>
+            <a:r>
+              <a:rPr sz="1100" b="1" i="0">
+                <a:solidFill>
+                  <a:srgbClr val="F5B83D"/>
+                </a:solidFill>
+                <a:latin typeface="Calibri"/>
+              </a:rPr>
+              <a:t>TRY THE INSTRUMENT LIVE</a:t>
+            </a:r>
+          </a:p>
+          <a:p>
+            <a:pPr algn="l">
+              <a:spcAft>
+                <a:spcPts val="0"/>
+              </a:spcAft>
+            </a:pPr>
+            <a:r>
+              <a:rPr sz="2200" b="1" i="0">
                 <a:solidFill>
                   <a:srgbClr val="EEF3FA"/>
                 </a:solidFill>
                 <a:latin typeface="Calibri"/>
               </a:rPr>
-              <a:t>0</a:t>
-            </a:r>
-          </a:p>
-        </p:txBody>
-      </p:sp>
-      <p:sp>
-        <p:nvSpPr>
-          <p:cNvPr id="38" name="Rounded Rectangle 37"/>
-          <p:cNvSpPr/>
-          <p:nvPr/>
-        </p:nvSpPr>
-        <p:spPr>
-          <a:xfrm>
-            <a:off x="6446520" y="5029200"/>
-            <a:ext cx="5056632" cy="566928"/>
-          </a:xfrm>
-          <a:prstGeom prst="roundRect">
-            <a:avLst>
-              <a:gd name="adj" fmla="val 6000"/>
-            </a:avLst>
-          </a:prstGeom>
-          <a:solidFill>
-            <a:srgbClr val="12223C"/>
-          </a:solidFill>
-          <a:ln w="25400">
-            <a:solidFill>
-              <a:srgbClr val="FF7A59"/>
-            </a:solidFill>
-          </a:ln>
-          <a:effectLst/>
-        </p:spPr>
-        <p:style>
-          <a:lnRef idx="1">
-            <a:schemeClr val="accent1"/>
-          </a:lnRef>
-          <a:fillRef idx="3">
-            <a:schemeClr val="accent1"/>
-          </a:fillRef>
-          <a:effectRef idx="2">
-            <a:schemeClr val="accent1"/>
-          </a:effectRef>
-          <a:fontRef idx="minor">
-            <a:schemeClr val="lt1"/>
-          </a:fontRef>
-        </p:style>
-        <p:txBody>
-          <a:bodyPr rtlCol="0" anchor="ctr" wrap="square" lIns="548640" rIns="201168" tIns="109728" bIns="109728"/>
-          <a:lstStyle/>
+              <a:t>monarch-4iy.pages.dev</a:t>
+            </a:r>
+          </a:p>
           <a:p>
             <a:pPr algn="l">
               <a:spcAft>
@@ -23629,44 +24034,20 @@
               </a:spcAft>
             </a:pPr>
             <a:r>
-              <a:rPr sz="1400" b="1" i="0">
+              <a:rPr sz="1100" b="0" i="0">
                 <a:solidFill>
-                  <a:srgbClr val="FF7A59"/>
+                  <a:srgbClr val="9AABC4"/>
                 </a:solidFill>
                 <a:latin typeface="Calibri"/>
               </a:rPr>
-              <a:t>Nobody scanned: every value is predicted</a:t>
-            </a:r>
-          </a:p>
-        </p:txBody>
-      </p:sp>
-      <p:pic>
-        <p:nvPicPr>
-          <p:cNvPr id="39" name="Picture 38" descr="warning.png"/>
-          <p:cNvPicPr>
-            <a:picLocks noChangeAspect="1"/>
-          </p:cNvPicPr>
-          <p:nvPr/>
-        </p:nvPicPr>
-        <p:blipFill>
-          <a:blip r:embed="rId10"/>
-          <a:stretch>
-            <a:fillRect/>
-          </a:stretch>
-        </p:blipFill>
-        <p:spPr>
-          <a:xfrm>
-            <a:off x="6611112" y="5175504"/>
-            <a:ext cx="274320" cy="274320"/>
-          </a:xfrm>
-          <a:prstGeom prst="rect">
-            <a:avLst/>
-          </a:prstGeom>
-        </p:spPr>
-      </p:pic>
-      <p:sp>
-        <p:nvSpPr>
-          <p:cNvPr id="40" name="TextBox 39"/>
+              <a:t>code and data: github.com/brn-mwai/monarch</a:t>
+            </a:r>
+          </a:p>
+        </p:txBody>
+      </p:sp>
+      <p:sp>
+        <p:nvSpPr>
+          <p:cNvPr id="41" name="TextBox 40"/>
           <p:cNvSpPr txBox="1"/>
           <p:nvPr/>
         </p:nvSpPr>
@@ -23705,7 +24086,7 @@
       </p:sp>
       <p:sp>
         <p:nvSpPr>
-          <p:cNvPr id="41" name="Rectangle 40"/>
+          <p:cNvPr id="42" name="Rectangle 41"/>
           <p:cNvSpPr/>
           <p:nvPr/>
         </p:nvSpPr>
@@ -23749,7 +24130,7 @@
       </p:sp>
       <p:sp>
         <p:nvSpPr>
-          <p:cNvPr id="42" name="Rectangle 41"/>
+          <p:cNvPr id="43" name="Rectangle 42"/>
           <p:cNvSpPr/>
           <p:nvPr/>
         </p:nvSpPr>
@@ -23793,7 +24174,7 @@
       </p:sp>
       <p:sp>
         <p:nvSpPr>
-          <p:cNvPr id="43" name="Rectangle 42"/>
+          <p:cNvPr id="44" name="Rectangle 43"/>
           <p:cNvSpPr/>
           <p:nvPr/>
         </p:nvSpPr>
@@ -23839,7 +24220,7 @@
       </p:sp>
       <p:sp>
         <p:nvSpPr>
-          <p:cNvPr id="44" name="Rectangle 43"/>
+          <p:cNvPr id="45" name="Rectangle 44"/>
           <p:cNvSpPr/>
           <p:nvPr/>
         </p:nvSpPr>
@@ -23885,7 +24266,7 @@
       </p:sp>
       <p:sp>
         <p:nvSpPr>
-          <p:cNvPr id="45" name="Rectangle 44"/>
+          <p:cNvPr id="46" name="Rectangle 45"/>
           <p:cNvSpPr/>
           <p:nvPr/>
         </p:nvSpPr>
@@ -23931,7 +24312,7 @@
       </p:sp>
       <p:sp>
         <p:nvSpPr>
-          <p:cNvPr id="46" name="TextBox 45"/>
+          <p:cNvPr id="47" name="TextBox 46"/>
           <p:cNvSpPr txBox="1"/>
           <p:nvPr/>
         </p:nvSpPr>

--- a/docs/defence/Monarch_Supervisor_Deck_Script.pptx
+++ b/docs/defence/Monarch_Supervisor_Deck_Script.pptx
@@ -1007,6 +1007,12 @@
           <a:lstStyle/>
           <a:p>
             <a:r>
+              <a:t>KEY POINT: Media's push on opinion is always guessed. This work measures a candidate for it and turns its unknown strength into a minimum any claim must meet.</a:t>
+            </a:r>
+          </a:p>
+          <a:p/>
+          <a:p>
+            <a:r>
               <a:t>SCRIPT (about 1 min)</a:t>
             </a:r>
           </a:p>
@@ -1040,6 +1046,17 @@
           <a:p>
             <a:r>
               <a:t>- Sociophysics: using the tools of statistical physics to model how groups of people behave.</a:t>
+            </a:r>
+          </a:p>
+          <a:p/>
+          <a:p>
+            <a:r>
+              <a:t>IF ASKED "SO WHAT?"</a:t>
+            </a:r>
+          </a:p>
+          <a:p>
+            <a:r>
+              <a:t>Opinion models treat media as a push, but everyone guesses how big it is. I built a way to measure a candidate for that push from the content itself. It picks up real, repeatable differences between kinds of articles, though it is tangled with where they came from, so I don't claim it detects manipulation. But even without knowing the exact strength, the measured spread gives a floor: media would need a coupling of at least 4.29 to flip a strongly connected group. That turns a guessed number into a testable one.</a:t>
             </a:r>
           </a:p>
         </p:txBody>
@@ -1109,6 +1126,12 @@
           <a:lstStyle/>
           <a:p>
             <a:r>
+              <a:t>KEY POINT: The brain model matches real brains weakly but positively: a usable, not perfect, instrument.</a:t>
+            </a:r>
+          </a:p>
+          <a:p/>
+          <a:p>
+            <a:r>
               <a:t>SCRIPT (about 1 min)</a:t>
             </a:r>
           </a:p>
@@ -1236,12 +1259,18 @@
           <a:lstStyle/>
           <a:p>
             <a:r>
+              <a:t>KEY POINT: Even without measuring alpha, the measured spread sets a floor: alpha at least 4.29 at beta J = 2. The source confound does not break it.</a:t>
+            </a:r>
+          </a:p>
+          <a:p/>
+          <a:p>
+            <a:r>
               <a:t>SCRIPT (about 1.5 min)</a:t>
             </a:r>
           </a:p>
           <a:p>
             <a:r>
-              <a:t>The physics result. We connect our score to the model by saying the external field, the media push, equals a coupling constant alpha times our observable X, the score. We could not measure alpha, so we asked how big it must be to flip a majority. The model gives the critical field, h c: the smallest outside push that flips the group's average opinion, like the field needed to flip a magnet. It grows with the reduced coupling, beta J, which is how strongly people copy each other. Above one, a group settles on a majority by itself, like a magnet below its Curie temperature. Dividing the critical field by the spread of our scores, delta X of 0.124, gives the curve. When beta J is 2, a strongly connected group, alpha must be at least 4.29. It is a bar any future claim must clear, not a claim that media flips opinion.</a:t>
+              <a:t>We link our score to the model: the external field equals a coupling constant, alpha, times our score X. We couldn't measure alpha, so we asked how big it must be to flip a majority. The critical field, h c, is the smallest push that does that, and it grows with the reduced coupling, beta J, how strongly people copy each other. Divide it by the spread of our scores, 0.124, and you get this curve. At beta J of 2, alpha must be at least 4.29. A bar to clear, not a claim that media flips opinion.</a:t>
             </a:r>
           </a:p>
           <a:p/>
@@ -1299,6 +1328,17 @@
           <a:p>
             <a:r>
               <a:t>- Lower bound: a minimum value; the result says alpha can't be smaller than this.</a:t>
+            </a:r>
+          </a:p>
+          <a:p/>
+          <a:p>
+            <a:r>
+              <a:t>IF ASKED "SO WHAT?"</a:t>
+            </a:r>
+          </a:p>
+          <a:p>
+            <a:r>
+              <a:t>Opinion models treat media as a push, but everyone guesses how big it is. I built a way to measure a candidate for that push from the content itself. It picks up real, repeatable differences between kinds of articles, though it is tangled with where they came from, so I don't claim it detects manipulation. But even without knowing the exact strength, the measured spread gives a floor: media would need a coupling of at least 4.29 to flip a strongly connected group. That turns a guessed number into a testable one.</a:t>
             </a:r>
           </a:p>
           <a:p/>
@@ -1395,6 +1435,12 @@
           <a:lstStyle/>
           <a:p>
             <a:r>
+              <a:t>KEY POINT: Technically possible, not yet valid for children: the model learned from adult brains.</a:t>
+            </a:r>
+          </a:p>
+          <a:p/>
+          <a:p>
+            <a:r>
               <a:t>SCRIPT (about 1 min)</a:t>
             </a:r>
           </a:p>
@@ -1535,6 +1581,12 @@
           <a:lstStyle/>
           <a:p>
             <a:r>
+              <a:t>KEY POINT: Every limit is stated openly and points to a specific next study.</a:t>
+            </a:r>
+          </a:p>
+          <a:p/>
+          <a:p>
+            <a:r>
               <a:t>SCRIPT (about 0.5 min)</a:t>
             </a:r>
           </a:p>
@@ -1637,6 +1689,12 @@
           <a:lstStyle/>
           <a:p>
             <a:r>
+              <a:t>KEY POINT: The work opens three paths: publishing, extensions (Kenya, video, children), and postgraduate research.</a:t>
+            </a:r>
+          </a:p>
+          <a:p/>
+          <a:p>
+            <a:r>
               <a:t>SCRIPT (about 1 min)</a:t>
             </a:r>
           </a:p>
@@ -1776,6 +1834,12 @@
           <a:lstStyle/>
           <a:p>
             <a:r>
+              <a:t>KEY POINT: Three papers follow. Today I need corrections, the signature and library clearance.</a:t>
+            </a:r>
+          </a:p>
+          <a:p/>
+          <a:p>
+            <a:r>
               <a:t>SCRIPT (about 1.5 min)</a:t>
             </a:r>
           </a:p>
@@ -1809,6 +1873,17 @@
           <a:p>
             <a:r>
               <a:t>- Library deposit: submitting the bound thesis to the university library, needed for graduation clearance.</a:t>
+            </a:r>
+          </a:p>
+          <a:p/>
+          <a:p>
+            <a:r>
+              <a:t>IF ASKED "SO WHAT?"</a:t>
+            </a:r>
+          </a:p>
+          <a:p>
+            <a:r>
+              <a:t>Opinion models treat media as a push, but everyone guesses how big it is. I built a way to measure a candidate for that push from the content itself. It picks up real, repeatable differences between kinds of articles, though it is tangled with where they came from, so I don't claim it detects manipulation. But even without knowing the exact strength, the measured spread gives a floor: media would need a coupling of at least 4.29 to flip a strongly connected group. That turns a guessed number into a testable one.</a:t>
             </a:r>
           </a:p>
         </p:txBody>
@@ -1878,12 +1953,18 @@
           <a:lstStyle/>
           <a:p>
             <a:r>
+              <a:t>KEY POINT: In the opinion model, the external field (media's push) is an input nobody measures. That gap is the whole project.</a:t>
+            </a:r>
+          </a:p>
+          <a:p/>
+          <a:p>
+            <a:r>
               <a:t>SCRIPT (about 1 min)</a:t>
             </a:r>
           </a:p>
           <a:p>
             <a:r>
-              <a:t>Physicists model a group forming an opinion with the Ising model, the same maths as tiny magnets lining up. In a magnet each atom's spin points up or down; here each person holds one of two opinions. The equation says the magnetisation equals tanh of the reduced coupling times the magnetisation, plus the external field. The magnetisation, m, is not mass: it is the average direction of all the spins, so here it is the group's average opinion, from minus one, everyone against, to plus one, everyone for. The coupling, J, is how strongly each person is pulled toward the people around them. Beta is the inverse temperature: in a magnet, one over the temperature; here, how firmly people follow that pull instead of acting at random. The external field, h, is in a magnet an outside magnetic field; here it is the push from media, the same on everyone. In every study I read, the external field is chosen by hand. My question: can we measure it from the content itself?</a:t>
+              <a:t>This is the Ising model, the maths of magnets lining up, used here for opinions. Each person is like a spin, pointing for or against. The magnetisation, m, not mass, is the group's average opinion, from minus one to plus one. The coupling, J, is how strongly people copy those around them. Beta, the inverse temperature, is how firmly they follow that pull rather than act at random. The external field, h, is media's push on everyone. Every study picks h by hand. My question: can we measure it from the content itself?</a:t>
             </a:r>
           </a:p>
           <a:p/>
@@ -2005,6 +2086,12 @@
           <a:lstStyle/>
           <a:p>
             <a:r>
+              <a:t>KEY POINT: Testing the tools changed the plan. Every change is documented and approved, not hidden.</a:t>
+            </a:r>
+          </a:p>
+          <a:p/>
+          <a:p>
+            <a:r>
               <a:t>SCRIPT (about 1.5 min)</a:t>
             </a:r>
           </a:p>
@@ -2133,6 +2220,12 @@
           <a:lstStyle/>
           <a:p>
             <a:r>
+              <a:t>KEY POINT: Every value is a prediction from a published brain model, not a scan of anyone, and anyone can check it on the live tool.</a:t>
+            </a:r>
+          </a:p>
+          <a:p/>
+          <a:p>
+            <a:r>
               <a:t>SCRIPT (about 1.5 min)</a:t>
             </a:r>
           </a:p>
@@ -2308,6 +2401,12 @@
           <a:lstStyle/>
           <a:p>
             <a:r>
+              <a:t>KEY POINT: The article set was designed fairly before scanning: equal groups, equal length, big enough to see a small effect.</a:t>
+            </a:r>
+          </a:p>
+          <a:p/>
+          <a:p>
+            <a:r>
               <a:t>SCRIPT (about 1 min)</a:t>
             </a:r>
           </a:p>
@@ -2457,6 +2556,12 @@
           <a:lstStyle/>
           <a:p>
             <a:r>
+              <a:t>KEY POINT: The groups really differ, but group explains only about 11%. Most variation is between individual articles.</a:t>
+            </a:r>
+          </a:p>
+          <a:p/>
+          <a:p>
+            <a:r>
               <a:t>SCRIPT (about 1 min)</a:t>
             </a:r>
           </a:p>
@@ -2574,6 +2679,12 @@
           <a:lstStyle/>
           <a:p>
             <a:r>
+              <a:t>KEY POINT: Fear drives the effect. Outrage stays flat because it lifts emotion and reasoning together, not because it has no effect.</a:t>
+            </a:r>
+          </a:p>
+          <a:p/>
+          <a:p>
+            <a:r>
               <a:t>SCRIPT (about 1 min)</a:t>
             </a:r>
           </a:p>
@@ -2686,6 +2797,12 @@
           <a:lstStyle/>
           <a:p>
             <a:r>
+              <a:t>KEY POINT: The score is reliable for groups, not for single articles.</a:t>
+            </a:r>
+          </a:p>
+          <a:p/>
+          <a:p>
+            <a:r>
               <a:t>SCRIPT (about 1 min)</a:t>
             </a:r>
           </a:p>
@@ -2796,6 +2913,12 @@
         <p:txBody>
           <a:bodyPr/>
           <a:lstStyle/>
+          <a:p>
+            <a:r>
+              <a:t>KEY POINT: The score is tangled with source, so it is a physics measurement, not a manipulation detector.</a:t>
+            </a:r>
+          </a:p>
+          <a:p/>
           <a:p>
             <a:r>
               <a:t>SCRIPT (about 1.5 min)</a:t>
